--- a/Final Presentation/Final Presentation.pptx
+++ b/Final Presentation/Final Presentation.pptx
@@ -27,8 +27,8 @@
     <p:sldId id="268" r:id="rId18"/>
     <p:sldId id="272" r:id="rId19"/>
     <p:sldId id="327" r:id="rId20"/>
-    <p:sldId id="323" r:id="rId21"/>
-    <p:sldId id="329" r:id="rId22"/>
+    <p:sldId id="329" r:id="rId21"/>
+    <p:sldId id="323" r:id="rId22"/>
     <p:sldId id="332" r:id="rId23"/>
   </p:sldIdLst>
   <p:sldSz cx="12192000" cy="6858000"/>
@@ -160,18 +160,18 @@
   <pc:docChgLst>
     <pc:chgData name="Nayeem, Nafis" userId="501e7d29-9a6e-420d-9190-7ecfb70ed608" providerId="ADAL" clId="{5FAE8530-652B-4B63-A3B6-392FC509CDE9}"/>
     <pc:docChg chg="undo custSel addSld delSld modSld sldOrd">
-      <pc:chgData name="Nayeem, Nafis" userId="501e7d29-9a6e-420d-9190-7ecfb70ed608" providerId="ADAL" clId="{5FAE8530-652B-4B63-A3B6-392FC509CDE9}" dt="2026-05-05T14:45:01.544" v="204" actId="20577"/>
+      <pc:chgData name="Nayeem, Nafis" userId="501e7d29-9a6e-420d-9190-7ecfb70ed608" providerId="ADAL" clId="{5FAE8530-652B-4B63-A3B6-392FC509CDE9}" dt="2026-05-06T02:20:05.019" v="210" actId="20577"/>
       <pc:docMkLst>
         <pc:docMk/>
       </pc:docMkLst>
       <pc:sldChg chg="modSp mod">
-        <pc:chgData name="Nayeem, Nafis" userId="501e7d29-9a6e-420d-9190-7ecfb70ed608" providerId="ADAL" clId="{5FAE8530-652B-4B63-A3B6-392FC509CDE9}" dt="2026-05-05T14:45:01.544" v="204" actId="20577"/>
+        <pc:chgData name="Nayeem, Nafis" userId="501e7d29-9a6e-420d-9190-7ecfb70ed608" providerId="ADAL" clId="{5FAE8530-652B-4B63-A3B6-392FC509CDE9}" dt="2026-05-06T02:20:05.019" v="210" actId="20577"/>
         <pc:sldMkLst>
           <pc:docMk/>
           <pc:sldMk cId="2301738303" sldId="264"/>
         </pc:sldMkLst>
         <pc:spChg chg="mod">
-          <ac:chgData name="Nayeem, Nafis" userId="501e7d29-9a6e-420d-9190-7ecfb70ed608" providerId="ADAL" clId="{5FAE8530-652B-4B63-A3B6-392FC509CDE9}" dt="2026-05-05T14:45:01.544" v="204" actId="20577"/>
+          <ac:chgData name="Nayeem, Nafis" userId="501e7d29-9a6e-420d-9190-7ecfb70ed608" providerId="ADAL" clId="{5FAE8530-652B-4B63-A3B6-392FC509CDE9}" dt="2026-05-06T02:20:05.019" v="210" actId="20577"/>
           <ac:spMkLst>
             <pc:docMk/>
             <pc:sldMk cId="2301738303" sldId="264"/>
@@ -255,8 +255,8 @@
           </ac:spMkLst>
         </pc:spChg>
       </pc:sldChg>
-      <pc:sldChg chg="add del">
-        <pc:chgData name="Nayeem, Nafis" userId="501e7d29-9a6e-420d-9190-7ecfb70ed608" providerId="ADAL" clId="{5FAE8530-652B-4B63-A3B6-392FC509CDE9}" dt="2026-05-05T14:23:11.401" v="7" actId="47"/>
+      <pc:sldChg chg="add del mod modShow">
+        <pc:chgData name="Nayeem, Nafis" userId="501e7d29-9a6e-420d-9190-7ecfb70ed608" providerId="ADAL" clId="{5FAE8530-652B-4B63-A3B6-392FC509CDE9}" dt="2026-05-05T15:06:17.155" v="205" actId="729"/>
         <pc:sldMkLst>
           <pc:docMk/>
           <pc:sldMk cId="448340218" sldId="295"/>
@@ -316,6 +316,13 @@
         <pc:sldMkLst>
           <pc:docMk/>
           <pc:sldMk cId="1479428066" sldId="321"/>
+        </pc:sldMkLst>
+      </pc:sldChg>
+      <pc:sldChg chg="ord">
+        <pc:chgData name="Nayeem, Nafis" userId="501e7d29-9a6e-420d-9190-7ecfb70ed608" providerId="ADAL" clId="{5FAE8530-652B-4B63-A3B6-392FC509CDE9}" dt="2026-05-05T15:18:49.743" v="207"/>
+        <pc:sldMkLst>
+          <pc:docMk/>
+          <pc:sldMk cId="3578494178" sldId="323"/>
         </pc:sldMkLst>
       </pc:sldChg>
       <pc:sldChg chg="del">
@@ -13581,7 +13588,7 @@
                 <a:latin typeface="Rubik" panose="02000604000000020004" pitchFamily="2" charset="-79"/>
                 <a:cs typeface="Rubik" panose="02000604000000020004" pitchFamily="2" charset="-79"/>
               </a:rPr>
-              <a:t>Nafis Mohammad Nayeem, Dr. Imraan A Faruque, Dr Martin Hegan</a:t>
+              <a:t>Nafis Mohammad Nayeem, Dr. Imraan A Faruque, Dr. Martin Hagan</a:t>
             </a:r>
           </a:p>
         </p:txBody>
@@ -15407,7 +15414,7 @@
 </file>
 
 <file path=ppt/slides/slide12.xml><?xml version="1.0" encoding="utf-8"?>
-<p:sld xmlns:a="http://schemas.openxmlformats.org/drawingml/2006/main" xmlns:r="http://schemas.openxmlformats.org/officeDocument/2006/relationships" xmlns:p="http://schemas.openxmlformats.org/presentationml/2006/main">
+<p:sld xmlns:a="http://schemas.openxmlformats.org/drawingml/2006/main" xmlns:r="http://schemas.openxmlformats.org/officeDocument/2006/relationships" xmlns:p="http://schemas.openxmlformats.org/presentationml/2006/main" show="0">
   <p:cSld>
     <p:spTree>
       <p:nvGrpSpPr>
@@ -19039,6 +19046,980 @@
   <p:cSld>
     <p:spTree>
       <p:nvGrpSpPr>
+        <p:cNvPr id="1" name=""/>
+        <p:cNvGrpSpPr/>
+        <p:nvPr/>
+      </p:nvGrpSpPr>
+      <p:grpSpPr>
+        <a:xfrm>
+          <a:off x="0" y="0"/>
+          <a:ext cx="0" cy="0"/>
+          <a:chOff x="0" y="0"/>
+          <a:chExt cx="0" cy="0"/>
+        </a:xfrm>
+      </p:grpSpPr>
+      <p:sp>
+        <p:nvSpPr>
+          <p:cNvPr id="2" name="Rectangle 1"/>
+          <p:cNvSpPr/>
+          <p:nvPr/>
+        </p:nvSpPr>
+        <p:spPr>
+          <a:xfrm>
+            <a:off x="0" y="0"/>
+            <a:ext cx="12191695" cy="530352"/>
+          </a:xfrm>
+          <a:prstGeom prst="rect">
+            <a:avLst/>
+          </a:prstGeom>
+          <a:solidFill>
+            <a:srgbClr val="0B1F44"/>
+          </a:solidFill>
+          <a:ln>
+            <a:noFill/>
+          </a:ln>
+        </p:spPr>
+        <p:style>
+          <a:lnRef idx="1">
+            <a:schemeClr val="accent1"/>
+          </a:lnRef>
+          <a:fillRef idx="3">
+            <a:schemeClr val="accent1"/>
+          </a:fillRef>
+          <a:effectRef idx="2">
+            <a:schemeClr val="accent1"/>
+          </a:effectRef>
+          <a:fontRef idx="minor">
+            <a:schemeClr val="lt1"/>
+          </a:fontRef>
+        </p:style>
+        <p:txBody>
+          <a:bodyPr rtlCol="0" anchor="ctr"/>
+          <a:lstStyle/>
+          <a:p>
+            <a:pPr algn="ctr"/>
+            <a:endParaRPr/>
+          </a:p>
+        </p:txBody>
+      </p:sp>
+      <p:sp>
+        <p:nvSpPr>
+          <p:cNvPr id="3" name="TextBox 2"/>
+          <p:cNvSpPr txBox="1"/>
+          <p:nvPr/>
+        </p:nvSpPr>
+        <p:spPr>
+          <a:xfrm>
+            <a:off x="320040" y="91440"/>
+            <a:ext cx="9418320" cy="363176"/>
+          </a:xfrm>
+          <a:prstGeom prst="rect">
+            <a:avLst/>
+          </a:prstGeom>
+          <a:noFill/>
+        </p:spPr>
+        <p:txBody>
+          <a:bodyPr wrap="square" lIns="54864" tIns="27432" rIns="54864" bIns="27432">
+            <a:spAutoFit/>
+          </a:bodyPr>
+          <a:lstStyle/>
+          <a:p>
+            <a:pPr algn="l"/>
+            <a:r>
+              <a:rPr lang="en-US" sz="2000" b="1" dirty="0">
+                <a:solidFill>
+                  <a:srgbClr val="FFFFFF"/>
+                </a:solidFill>
+                <a:latin typeface="Aptos"/>
+              </a:rPr>
+              <a:t>N</a:t>
+            </a:r>
+            <a:r>
+              <a:rPr sz="2000" b="1" dirty="0">
+                <a:solidFill>
+                  <a:srgbClr val="FFFFFF"/>
+                </a:solidFill>
+                <a:latin typeface="Aptos"/>
+              </a:rPr>
+              <a:t>ext steps</a:t>
+            </a:r>
+          </a:p>
+        </p:txBody>
+      </p:sp>
+      <p:sp>
+        <p:nvSpPr>
+          <p:cNvPr id="4" name="TextBox 3"/>
+          <p:cNvSpPr txBox="1"/>
+          <p:nvPr/>
+        </p:nvSpPr>
+        <p:spPr>
+          <a:xfrm>
+            <a:off x="9921240" y="137160"/>
+            <a:ext cx="1828800" cy="274320"/>
+          </a:xfrm>
+          <a:prstGeom prst="rect">
+            <a:avLst/>
+          </a:prstGeom>
+          <a:noFill/>
+        </p:spPr>
+        <p:txBody>
+          <a:bodyPr wrap="square" lIns="54864" tIns="27432" rIns="54864" bIns="27432">
+            <a:spAutoFit/>
+          </a:bodyPr>
+          <a:lstStyle/>
+          <a:p>
+            <a:pPr algn="r"/>
+            <a:r>
+              <a:rPr sz="1000" b="0">
+                <a:solidFill>
+                  <a:srgbClr val="CBD5E1"/>
+                </a:solidFill>
+                <a:latin typeface="Aptos"/>
+              </a:rPr>
+              <a:t>Close</a:t>
+            </a:r>
+          </a:p>
+        </p:txBody>
+      </p:sp>
+      <p:sp>
+        <p:nvSpPr>
+          <p:cNvPr id="5" name="Oval 4"/>
+          <p:cNvSpPr/>
+          <p:nvPr/>
+        </p:nvSpPr>
+        <p:spPr>
+          <a:xfrm>
+            <a:off x="11759184" y="100584"/>
+            <a:ext cx="310896" cy="310896"/>
+          </a:xfrm>
+          <a:prstGeom prst="ellipse">
+            <a:avLst/>
+          </a:prstGeom>
+          <a:solidFill>
+            <a:srgbClr val="2563EB"/>
+          </a:solidFill>
+          <a:ln w="12700">
+            <a:solidFill>
+              <a:srgbClr val="93C5FD"/>
+            </a:solidFill>
+          </a:ln>
+        </p:spPr>
+        <p:style>
+          <a:lnRef idx="1">
+            <a:schemeClr val="accent1"/>
+          </a:lnRef>
+          <a:fillRef idx="3">
+            <a:schemeClr val="accent1"/>
+          </a:fillRef>
+          <a:effectRef idx="2">
+            <a:schemeClr val="accent1"/>
+          </a:effectRef>
+          <a:fontRef idx="minor">
+            <a:schemeClr val="lt1"/>
+          </a:fontRef>
+        </p:style>
+        <p:txBody>
+          <a:bodyPr rtlCol="0" anchor="ctr"/>
+          <a:lstStyle/>
+          <a:p>
+            <a:pPr algn="ctr"/>
+            <a:endParaRPr/>
+          </a:p>
+        </p:txBody>
+      </p:sp>
+      <p:sp>
+        <p:nvSpPr>
+          <p:cNvPr id="6" name="TextBox 5"/>
+          <p:cNvSpPr txBox="1"/>
+          <p:nvPr/>
+        </p:nvSpPr>
+        <p:spPr>
+          <a:xfrm>
+            <a:off x="11759184" y="132588"/>
+            <a:ext cx="310896" cy="201168"/>
+          </a:xfrm>
+          <a:prstGeom prst="rect">
+            <a:avLst/>
+          </a:prstGeom>
+          <a:noFill/>
+        </p:spPr>
+        <p:txBody>
+          <a:bodyPr wrap="square" lIns="54864" tIns="27432" rIns="54864" bIns="27432">
+            <a:spAutoFit/>
+          </a:bodyPr>
+          <a:lstStyle/>
+          <a:p>
+            <a:pPr algn="ctr"/>
+            <a:r>
+              <a:rPr sz="800" b="1">
+                <a:solidFill>
+                  <a:srgbClr val="FFFFFF"/>
+                </a:solidFill>
+                <a:latin typeface="Aptos"/>
+              </a:rPr>
+              <a:t>20</a:t>
+            </a:r>
+          </a:p>
+        </p:txBody>
+      </p:sp>
+      <p:sp>
+        <p:nvSpPr>
+          <p:cNvPr id="7" name="TextBox 6"/>
+          <p:cNvSpPr txBox="1"/>
+          <p:nvPr/>
+        </p:nvSpPr>
+        <p:spPr>
+          <a:xfrm>
+            <a:off x="320040" y="6565392"/>
+            <a:ext cx="7498079" cy="201168"/>
+          </a:xfrm>
+          <a:prstGeom prst="rect">
+            <a:avLst/>
+          </a:prstGeom>
+          <a:noFill/>
+        </p:spPr>
+        <p:txBody>
+          <a:bodyPr wrap="square" lIns="54864" tIns="27432" rIns="54864" bIns="27432">
+            <a:spAutoFit/>
+          </a:bodyPr>
+          <a:lstStyle/>
+          <a:p>
+            <a:pPr algn="l"/>
+            <a:r>
+              <a:rPr sz="800" b="0">
+                <a:solidFill>
+                  <a:srgbClr val="64748B"/>
+                </a:solidFill>
+                <a:latin typeface="Aptos"/>
+              </a:rPr>
+              <a:t>Comparison of sensor-conditioned and dynamics-learning PINNs for fixed-wing UAV state estimation</a:t>
+            </a:r>
+          </a:p>
+        </p:txBody>
+      </p:sp>
+      <p:sp>
+        <p:nvSpPr>
+          <p:cNvPr id="8" name="TextBox 7"/>
+          <p:cNvSpPr txBox="1"/>
+          <p:nvPr/>
+        </p:nvSpPr>
+        <p:spPr>
+          <a:xfrm>
+            <a:off x="11247120" y="6565392"/>
+            <a:ext cx="640080" cy="201168"/>
+          </a:xfrm>
+          <a:prstGeom prst="rect">
+            <a:avLst/>
+          </a:prstGeom>
+          <a:noFill/>
+        </p:spPr>
+        <p:txBody>
+          <a:bodyPr wrap="square" lIns="54864" tIns="27432" rIns="54864" bIns="27432">
+            <a:spAutoFit/>
+          </a:bodyPr>
+          <a:lstStyle/>
+          <a:p>
+            <a:pPr algn="r"/>
+            <a:r>
+              <a:rPr sz="800" b="0">
+                <a:solidFill>
+                  <a:srgbClr val="64748B"/>
+                </a:solidFill>
+                <a:latin typeface="Aptos"/>
+              </a:rPr>
+              <a:t>20/20</a:t>
+            </a:r>
+          </a:p>
+        </p:txBody>
+      </p:sp>
+      <p:sp>
+        <p:nvSpPr>
+          <p:cNvPr id="9" name="Rounded Rectangle 8"/>
+          <p:cNvSpPr/>
+          <p:nvPr/>
+        </p:nvSpPr>
+        <p:spPr>
+          <a:xfrm>
+            <a:off x="777240" y="868680"/>
+            <a:ext cx="10652760" cy="1188720"/>
+          </a:xfrm>
+          <a:prstGeom prst="roundRect">
+            <a:avLst/>
+          </a:prstGeom>
+          <a:solidFill>
+            <a:srgbClr val="FFFFFF"/>
+          </a:solidFill>
+          <a:ln w="17780">
+            <a:solidFill>
+              <a:srgbClr val="0B1F44"/>
+            </a:solidFill>
+          </a:ln>
+        </p:spPr>
+        <p:style>
+          <a:lnRef idx="1">
+            <a:schemeClr val="accent1"/>
+          </a:lnRef>
+          <a:fillRef idx="3">
+            <a:schemeClr val="accent1"/>
+          </a:fillRef>
+          <a:effectRef idx="2">
+            <a:schemeClr val="accent1"/>
+          </a:effectRef>
+          <a:fontRef idx="minor">
+            <a:schemeClr val="lt1"/>
+          </a:fontRef>
+        </p:style>
+        <p:txBody>
+          <a:bodyPr rtlCol="0" anchor="ctr"/>
+          <a:lstStyle/>
+          <a:p>
+            <a:pPr algn="ctr"/>
+            <a:endParaRPr/>
+          </a:p>
+        </p:txBody>
+      </p:sp>
+      <p:sp>
+        <p:nvSpPr>
+          <p:cNvPr id="10" name="Rectangle 9"/>
+          <p:cNvSpPr/>
+          <p:nvPr/>
+        </p:nvSpPr>
+        <p:spPr>
+          <a:xfrm>
+            <a:off x="777240" y="868680"/>
+            <a:ext cx="73152" cy="1188720"/>
+          </a:xfrm>
+          <a:prstGeom prst="rect">
+            <a:avLst/>
+          </a:prstGeom>
+          <a:solidFill>
+            <a:srgbClr val="0B1F44"/>
+          </a:solidFill>
+          <a:ln>
+            <a:noFill/>
+          </a:ln>
+        </p:spPr>
+        <p:style>
+          <a:lnRef idx="1">
+            <a:schemeClr val="accent1"/>
+          </a:lnRef>
+          <a:fillRef idx="3">
+            <a:schemeClr val="accent1"/>
+          </a:fillRef>
+          <a:effectRef idx="2">
+            <a:schemeClr val="accent1"/>
+          </a:effectRef>
+          <a:fontRef idx="minor">
+            <a:schemeClr val="lt1"/>
+          </a:fontRef>
+        </p:style>
+        <p:txBody>
+          <a:bodyPr rtlCol="0" anchor="ctr"/>
+          <a:lstStyle/>
+          <a:p>
+            <a:pPr algn="ctr"/>
+            <a:endParaRPr/>
+          </a:p>
+        </p:txBody>
+      </p:sp>
+      <p:sp>
+        <p:nvSpPr>
+          <p:cNvPr id="11" name="TextBox 10"/>
+          <p:cNvSpPr txBox="1"/>
+          <p:nvPr/>
+        </p:nvSpPr>
+        <p:spPr>
+          <a:xfrm>
+            <a:off x="923544" y="960120"/>
+            <a:ext cx="10424160" cy="256032"/>
+          </a:xfrm>
+          <a:prstGeom prst="rect">
+            <a:avLst/>
+          </a:prstGeom>
+          <a:noFill/>
+        </p:spPr>
+        <p:txBody>
+          <a:bodyPr wrap="square" lIns="54864" tIns="27432" rIns="54864" bIns="27432">
+            <a:spAutoFit/>
+          </a:bodyPr>
+          <a:lstStyle/>
+          <a:p>
+            <a:pPr algn="l"/>
+            <a:r>
+              <a:rPr sz="1500" b="1">
+                <a:solidFill>
+                  <a:srgbClr val="0B1F44"/>
+                </a:solidFill>
+                <a:latin typeface="Aptos"/>
+              </a:rPr>
+              <a:t>Conclusion</a:t>
+            </a:r>
+          </a:p>
+        </p:txBody>
+      </p:sp>
+      <p:sp>
+        <p:nvSpPr>
+          <p:cNvPr id="12" name="TextBox 11"/>
+          <p:cNvSpPr txBox="1"/>
+          <p:nvPr/>
+        </p:nvSpPr>
+        <p:spPr>
+          <a:xfrm>
+            <a:off x="923544" y="1280160"/>
+            <a:ext cx="10424160" cy="547842"/>
+          </a:xfrm>
+          <a:prstGeom prst="rect">
+            <a:avLst/>
+          </a:prstGeom>
+          <a:noFill/>
+        </p:spPr>
+        <p:txBody>
+          <a:bodyPr wrap="square" lIns="54864" tIns="27432" rIns="54864" bIns="27432">
+            <a:spAutoFit/>
+          </a:bodyPr>
+          <a:lstStyle/>
+          <a:p>
+            <a:pPr algn="l"/>
+            <a:r>
+              <a:rPr sz="1600" b="0" dirty="0">
+                <a:solidFill>
+                  <a:srgbClr val="334155"/>
+                </a:solidFill>
+                <a:latin typeface="Aptos"/>
+              </a:rPr>
+              <a:t>The two PINN codes solve complementary tasks. The dynamics-learning PINN is stronger for temporal state propagation; the sensor-conditioned PINN is stronger for measurement-conditioned wind and velocity reconstruction.</a:t>
+            </a:r>
+          </a:p>
+        </p:txBody>
+      </p:sp>
+      <p:sp>
+        <p:nvSpPr>
+          <p:cNvPr id="13" name="Rounded Rectangle 12"/>
+          <p:cNvSpPr/>
+          <p:nvPr/>
+        </p:nvSpPr>
+        <p:spPr>
+          <a:xfrm>
+            <a:off x="777240" y="2331720"/>
+            <a:ext cx="3337560" cy="1828800"/>
+          </a:xfrm>
+          <a:prstGeom prst="roundRect">
+            <a:avLst/>
+          </a:prstGeom>
+          <a:solidFill>
+            <a:srgbClr val="FFFFFF"/>
+          </a:solidFill>
+          <a:ln w="17780">
+            <a:solidFill>
+              <a:srgbClr val="D97706"/>
+            </a:solidFill>
+          </a:ln>
+        </p:spPr>
+        <p:style>
+          <a:lnRef idx="1">
+            <a:schemeClr val="accent1"/>
+          </a:lnRef>
+          <a:fillRef idx="3">
+            <a:schemeClr val="accent1"/>
+          </a:fillRef>
+          <a:effectRef idx="2">
+            <a:schemeClr val="accent1"/>
+          </a:effectRef>
+          <a:fontRef idx="minor">
+            <a:schemeClr val="lt1"/>
+          </a:fontRef>
+        </p:style>
+        <p:txBody>
+          <a:bodyPr rtlCol="0" anchor="ctr"/>
+          <a:lstStyle/>
+          <a:p>
+            <a:pPr algn="ctr"/>
+            <a:endParaRPr/>
+          </a:p>
+        </p:txBody>
+      </p:sp>
+      <p:sp>
+        <p:nvSpPr>
+          <p:cNvPr id="14" name="Rectangle 13"/>
+          <p:cNvSpPr/>
+          <p:nvPr/>
+        </p:nvSpPr>
+        <p:spPr>
+          <a:xfrm>
+            <a:off x="777240" y="2331720"/>
+            <a:ext cx="73152" cy="1828800"/>
+          </a:xfrm>
+          <a:prstGeom prst="rect">
+            <a:avLst/>
+          </a:prstGeom>
+          <a:solidFill>
+            <a:srgbClr val="D97706"/>
+          </a:solidFill>
+          <a:ln>
+            <a:noFill/>
+          </a:ln>
+        </p:spPr>
+        <p:style>
+          <a:lnRef idx="1">
+            <a:schemeClr val="accent1"/>
+          </a:lnRef>
+          <a:fillRef idx="3">
+            <a:schemeClr val="accent1"/>
+          </a:fillRef>
+          <a:effectRef idx="2">
+            <a:schemeClr val="accent1"/>
+          </a:effectRef>
+          <a:fontRef idx="minor">
+            <a:schemeClr val="lt1"/>
+          </a:fontRef>
+        </p:style>
+        <p:txBody>
+          <a:bodyPr rtlCol="0" anchor="ctr"/>
+          <a:lstStyle/>
+          <a:p>
+            <a:pPr algn="ctr"/>
+            <a:endParaRPr/>
+          </a:p>
+        </p:txBody>
+      </p:sp>
+      <p:sp>
+        <p:nvSpPr>
+          <p:cNvPr id="15" name="TextBox 14"/>
+          <p:cNvSpPr txBox="1"/>
+          <p:nvPr/>
+        </p:nvSpPr>
+        <p:spPr>
+          <a:xfrm>
+            <a:off x="923544" y="2423160"/>
+            <a:ext cx="3108960" cy="256032"/>
+          </a:xfrm>
+          <a:prstGeom prst="rect">
+            <a:avLst/>
+          </a:prstGeom>
+          <a:noFill/>
+        </p:spPr>
+        <p:txBody>
+          <a:bodyPr wrap="square" lIns="54864" tIns="27432" rIns="54864" bIns="27432">
+            <a:spAutoFit/>
+          </a:bodyPr>
+          <a:lstStyle/>
+          <a:p>
+            <a:pPr algn="l"/>
+            <a:r>
+              <a:rPr sz="1400" b="1">
+                <a:solidFill>
+                  <a:srgbClr val="D97706"/>
+                </a:solidFill>
+                <a:latin typeface="Aptos"/>
+              </a:rPr>
+              <a:t>1. Best current use</a:t>
+            </a:r>
+          </a:p>
+        </p:txBody>
+      </p:sp>
+      <p:sp>
+        <p:nvSpPr>
+          <p:cNvPr id="16" name="TextBox 15"/>
+          <p:cNvSpPr txBox="1"/>
+          <p:nvPr/>
+        </p:nvSpPr>
+        <p:spPr>
+          <a:xfrm>
+            <a:off x="923544" y="2743200"/>
+            <a:ext cx="3108960" cy="1040285"/>
+          </a:xfrm>
+          <a:prstGeom prst="rect">
+            <a:avLst/>
+          </a:prstGeom>
+          <a:noFill/>
+        </p:spPr>
+        <p:txBody>
+          <a:bodyPr wrap="square" lIns="54864" tIns="27432" rIns="54864" bIns="27432">
+            <a:spAutoFit/>
+          </a:bodyPr>
+          <a:lstStyle/>
+          <a:p>
+            <a:pPr algn="l"/>
+            <a:r>
+              <a:rPr sz="1600" b="0" dirty="0">
+                <a:solidFill>
+                  <a:srgbClr val="334155"/>
+                </a:solidFill>
+                <a:latin typeface="Aptos"/>
+              </a:rPr>
+              <a:t>Use the dynamics-learning model for rollout-aware process correction, especially where temporal consistency dominates.</a:t>
+            </a:r>
+          </a:p>
+        </p:txBody>
+      </p:sp>
+      <p:sp>
+        <p:nvSpPr>
+          <p:cNvPr id="17" name="Rounded Rectangle 16"/>
+          <p:cNvSpPr/>
+          <p:nvPr/>
+        </p:nvSpPr>
+        <p:spPr>
+          <a:xfrm>
+            <a:off x="4434840" y="2331720"/>
+            <a:ext cx="3337560" cy="1828800"/>
+          </a:xfrm>
+          <a:prstGeom prst="roundRect">
+            <a:avLst/>
+          </a:prstGeom>
+          <a:solidFill>
+            <a:srgbClr val="FFFFFF"/>
+          </a:solidFill>
+          <a:ln w="17780">
+            <a:solidFill>
+              <a:srgbClr val="2266B2"/>
+            </a:solidFill>
+          </a:ln>
+        </p:spPr>
+        <p:style>
+          <a:lnRef idx="1">
+            <a:schemeClr val="accent1"/>
+          </a:lnRef>
+          <a:fillRef idx="3">
+            <a:schemeClr val="accent1"/>
+          </a:fillRef>
+          <a:effectRef idx="2">
+            <a:schemeClr val="accent1"/>
+          </a:effectRef>
+          <a:fontRef idx="minor">
+            <a:schemeClr val="lt1"/>
+          </a:fontRef>
+        </p:style>
+        <p:txBody>
+          <a:bodyPr rtlCol="0" anchor="ctr"/>
+          <a:lstStyle/>
+          <a:p>
+            <a:pPr algn="ctr"/>
+            <a:endParaRPr/>
+          </a:p>
+        </p:txBody>
+      </p:sp>
+      <p:sp>
+        <p:nvSpPr>
+          <p:cNvPr id="18" name="Rectangle 17"/>
+          <p:cNvSpPr/>
+          <p:nvPr/>
+        </p:nvSpPr>
+        <p:spPr>
+          <a:xfrm>
+            <a:off x="4434840" y="2331720"/>
+            <a:ext cx="73152" cy="1828800"/>
+          </a:xfrm>
+          <a:prstGeom prst="rect">
+            <a:avLst/>
+          </a:prstGeom>
+          <a:solidFill>
+            <a:srgbClr val="2266B2"/>
+          </a:solidFill>
+          <a:ln>
+            <a:noFill/>
+          </a:ln>
+        </p:spPr>
+        <p:style>
+          <a:lnRef idx="1">
+            <a:schemeClr val="accent1"/>
+          </a:lnRef>
+          <a:fillRef idx="3">
+            <a:schemeClr val="accent1"/>
+          </a:fillRef>
+          <a:effectRef idx="2">
+            <a:schemeClr val="accent1"/>
+          </a:effectRef>
+          <a:fontRef idx="minor">
+            <a:schemeClr val="lt1"/>
+          </a:fontRef>
+        </p:style>
+        <p:txBody>
+          <a:bodyPr rtlCol="0" anchor="ctr"/>
+          <a:lstStyle/>
+          <a:p>
+            <a:pPr algn="ctr"/>
+            <a:endParaRPr/>
+          </a:p>
+        </p:txBody>
+      </p:sp>
+      <p:sp>
+        <p:nvSpPr>
+          <p:cNvPr id="19" name="TextBox 18"/>
+          <p:cNvSpPr txBox="1"/>
+          <p:nvPr/>
+        </p:nvSpPr>
+        <p:spPr>
+          <a:xfrm>
+            <a:off x="4581144" y="2423160"/>
+            <a:ext cx="3108960" cy="256032"/>
+          </a:xfrm>
+          <a:prstGeom prst="rect">
+            <a:avLst/>
+          </a:prstGeom>
+          <a:noFill/>
+        </p:spPr>
+        <p:txBody>
+          <a:bodyPr wrap="square" lIns="54864" tIns="27432" rIns="54864" bIns="27432">
+            <a:spAutoFit/>
+          </a:bodyPr>
+          <a:lstStyle/>
+          <a:p>
+            <a:pPr algn="l"/>
+            <a:r>
+              <a:rPr sz="1400" b="1">
+                <a:solidFill>
+                  <a:srgbClr val="2266B2"/>
+                </a:solidFill>
+                <a:latin typeface="Aptos"/>
+              </a:rPr>
+              <a:t>2. Best current use</a:t>
+            </a:r>
+          </a:p>
+        </p:txBody>
+      </p:sp>
+      <p:sp>
+        <p:nvSpPr>
+          <p:cNvPr id="20" name="TextBox 19"/>
+          <p:cNvSpPr txBox="1"/>
+          <p:nvPr/>
+        </p:nvSpPr>
+        <p:spPr>
+          <a:xfrm>
+            <a:off x="4581144" y="2743200"/>
+            <a:ext cx="3108960" cy="1325880"/>
+          </a:xfrm>
+          <a:prstGeom prst="rect">
+            <a:avLst/>
+          </a:prstGeom>
+          <a:noFill/>
+        </p:spPr>
+        <p:txBody>
+          <a:bodyPr wrap="square" lIns="54864" tIns="27432" rIns="54864" bIns="27432">
+            <a:spAutoFit/>
+          </a:bodyPr>
+          <a:lstStyle/>
+          <a:p>
+            <a:pPr algn="l"/>
+            <a:r>
+              <a:rPr sz="1600" b="0" dirty="0">
+                <a:solidFill>
+                  <a:srgbClr val="334155"/>
+                </a:solidFill>
+                <a:latin typeface="Aptos"/>
+              </a:rPr>
+              <a:t>Use sensor conditioning for algebraic measurement consistency, wind recovery, and direct state reconstruction from noisy sensor channels.</a:t>
+            </a:r>
+          </a:p>
+        </p:txBody>
+      </p:sp>
+      <p:sp>
+        <p:nvSpPr>
+          <p:cNvPr id="21" name="Rounded Rectangle 20"/>
+          <p:cNvSpPr/>
+          <p:nvPr/>
+        </p:nvSpPr>
+        <p:spPr>
+          <a:xfrm>
+            <a:off x="8092440" y="2331720"/>
+            <a:ext cx="3337560" cy="1828800"/>
+          </a:xfrm>
+          <a:prstGeom prst="roundRect">
+            <a:avLst/>
+          </a:prstGeom>
+          <a:solidFill>
+            <a:srgbClr val="FFFFFF"/>
+          </a:solidFill>
+          <a:ln w="17780">
+            <a:solidFill>
+              <a:srgbClr val="6F42C1"/>
+            </a:solidFill>
+          </a:ln>
+        </p:spPr>
+        <p:style>
+          <a:lnRef idx="1">
+            <a:schemeClr val="accent1"/>
+          </a:lnRef>
+          <a:fillRef idx="3">
+            <a:schemeClr val="accent1"/>
+          </a:fillRef>
+          <a:effectRef idx="2">
+            <a:schemeClr val="accent1"/>
+          </a:effectRef>
+          <a:fontRef idx="minor">
+            <a:schemeClr val="lt1"/>
+          </a:fontRef>
+        </p:style>
+        <p:txBody>
+          <a:bodyPr rtlCol="0" anchor="ctr"/>
+          <a:lstStyle/>
+          <a:p>
+            <a:pPr algn="ctr"/>
+            <a:endParaRPr/>
+          </a:p>
+        </p:txBody>
+      </p:sp>
+      <p:sp>
+        <p:nvSpPr>
+          <p:cNvPr id="22" name="Rectangle 21"/>
+          <p:cNvSpPr/>
+          <p:nvPr/>
+        </p:nvSpPr>
+        <p:spPr>
+          <a:xfrm>
+            <a:off x="8092440" y="2331720"/>
+            <a:ext cx="73152" cy="1828800"/>
+          </a:xfrm>
+          <a:prstGeom prst="rect">
+            <a:avLst/>
+          </a:prstGeom>
+          <a:solidFill>
+            <a:srgbClr val="6F42C1"/>
+          </a:solidFill>
+          <a:ln>
+            <a:noFill/>
+          </a:ln>
+        </p:spPr>
+        <p:style>
+          <a:lnRef idx="1">
+            <a:schemeClr val="accent1"/>
+          </a:lnRef>
+          <a:fillRef idx="3">
+            <a:schemeClr val="accent1"/>
+          </a:fillRef>
+          <a:effectRef idx="2">
+            <a:schemeClr val="accent1"/>
+          </a:effectRef>
+          <a:fontRef idx="minor">
+            <a:schemeClr val="lt1"/>
+          </a:fontRef>
+        </p:style>
+        <p:txBody>
+          <a:bodyPr rtlCol="0" anchor="ctr"/>
+          <a:lstStyle/>
+          <a:p>
+            <a:pPr algn="ctr"/>
+            <a:endParaRPr/>
+          </a:p>
+        </p:txBody>
+      </p:sp>
+      <p:sp>
+        <p:nvSpPr>
+          <p:cNvPr id="23" name="TextBox 22"/>
+          <p:cNvSpPr txBox="1"/>
+          <p:nvPr/>
+        </p:nvSpPr>
+        <p:spPr>
+          <a:xfrm>
+            <a:off x="8238744" y="2423160"/>
+            <a:ext cx="3108960" cy="256032"/>
+          </a:xfrm>
+          <a:prstGeom prst="rect">
+            <a:avLst/>
+          </a:prstGeom>
+          <a:noFill/>
+        </p:spPr>
+        <p:txBody>
+          <a:bodyPr wrap="square" lIns="54864" tIns="27432" rIns="54864" bIns="27432">
+            <a:spAutoFit/>
+          </a:bodyPr>
+          <a:lstStyle/>
+          <a:p>
+            <a:pPr algn="l"/>
+            <a:r>
+              <a:rPr sz="1400" b="1">
+                <a:solidFill>
+                  <a:srgbClr val="6F42C1"/>
+                </a:solidFill>
+                <a:latin typeface="Aptos"/>
+              </a:rPr>
+              <a:t>3. Next architecture</a:t>
+            </a:r>
+          </a:p>
+        </p:txBody>
+      </p:sp>
+      <p:sp>
+        <p:nvSpPr>
+          <p:cNvPr id="24" name="TextBox 23"/>
+          <p:cNvSpPr txBox="1"/>
+          <p:nvPr/>
+        </p:nvSpPr>
+        <p:spPr>
+          <a:xfrm>
+            <a:off x="8238744" y="2743200"/>
+            <a:ext cx="3108960" cy="1040285"/>
+          </a:xfrm>
+          <a:prstGeom prst="rect">
+            <a:avLst/>
+          </a:prstGeom>
+          <a:noFill/>
+        </p:spPr>
+        <p:txBody>
+          <a:bodyPr wrap="square" lIns="54864" tIns="27432" rIns="54864" bIns="27432">
+            <a:spAutoFit/>
+          </a:bodyPr>
+          <a:lstStyle/>
+          <a:p>
+            <a:pPr algn="l"/>
+            <a:r>
+              <a:rPr sz="1600" b="0" dirty="0">
+                <a:solidFill>
+                  <a:srgbClr val="334155"/>
+                </a:solidFill>
+                <a:latin typeface="Aptos"/>
+              </a:rPr>
+              <a:t>Build a hybrid: sensor-conditioned transition correction inside a recursive filter with uncertainty and rollout training.</a:t>
+            </a:r>
+          </a:p>
+        </p:txBody>
+      </p:sp>
+      <p:sp>
+        <p:nvSpPr>
+          <p:cNvPr id="25" name="TextBox 24"/>
+          <p:cNvSpPr txBox="1"/>
+          <p:nvPr/>
+        </p:nvSpPr>
+        <p:spPr>
+          <a:xfrm>
+            <a:off x="914400" y="4892040"/>
+            <a:ext cx="10424160" cy="731520"/>
+          </a:xfrm>
+          <a:prstGeom prst="rect">
+            <a:avLst/>
+          </a:prstGeom>
+          <a:noFill/>
+        </p:spPr>
+        <p:txBody>
+          <a:bodyPr wrap="square" lIns="54864" tIns="27432" rIns="54864" bIns="27432">
+            <a:spAutoFit/>
+          </a:bodyPr>
+          <a:lstStyle/>
+          <a:p>
+            <a:pPr algn="ctr"/>
+            <a:r>
+              <a:rPr sz="1500" b="0">
+                <a:solidFill>
+                  <a:srgbClr val="334155"/>
+                </a:solidFill>
+                <a:latin typeface="Aptos"/>
+              </a:rPr>
+              <a:t>Recommended next experiment: train a recurrent sensor-conditioned transition PINN with measurement updates at every step, compare against EKF/IEKF using the exact saved RMSE arrays, and add ablations for Fourier features, rollout horizon, and physics weights.</a:t>
+            </a:r>
+          </a:p>
+        </p:txBody>
+      </p:sp>
+    </p:spTree>
+  </p:cSld>
+  <p:clrMapOvr>
+    <a:masterClrMapping/>
+  </p:clrMapOvr>
+</p:sld>
+</file>
+
+<file path=ppt/slides/slide21.xml><?xml version="1.0" encoding="utf-8"?>
+<p:sld xmlns:a="http://schemas.openxmlformats.org/drawingml/2006/main" xmlns:r="http://schemas.openxmlformats.org/officeDocument/2006/relationships" xmlns:p="http://schemas.openxmlformats.org/presentationml/2006/main">
+  <p:cSld>
+    <p:spTree>
+      <p:nvGrpSpPr>
         <p:cNvPr id="1" name="">
           <a:extLst>
             <a:ext uri="{FF2B5EF4-FFF2-40B4-BE49-F238E27FC236}">
@@ -19229,7 +20210,7 @@
           <a:p>
             <a:fld id="{8A69B41D-D4B6-FD40-8C8E-00FA62457801}" type="slidenum">
               <a:rPr lang="en-US" smtClean="0"/>
-              <a:t>20</a:t>
+              <a:t>21</a:t>
             </a:fld>
             <a:endParaRPr lang="en-US"/>
           </a:p>
@@ -19456,980 +20437,6 @@
         <p14:creationId xmlns:p14="http://schemas.microsoft.com/office/powerpoint/2010/main" val="3578494178"/>
       </p:ext>
     </p:extLst>
-  </p:cSld>
-  <p:clrMapOvr>
-    <a:masterClrMapping/>
-  </p:clrMapOvr>
-</p:sld>
-</file>
-
-<file path=ppt/slides/slide21.xml><?xml version="1.0" encoding="utf-8"?>
-<p:sld xmlns:a="http://schemas.openxmlformats.org/drawingml/2006/main" xmlns:r="http://schemas.openxmlformats.org/officeDocument/2006/relationships" xmlns:p="http://schemas.openxmlformats.org/presentationml/2006/main">
-  <p:cSld>
-    <p:spTree>
-      <p:nvGrpSpPr>
-        <p:cNvPr id="1" name=""/>
-        <p:cNvGrpSpPr/>
-        <p:nvPr/>
-      </p:nvGrpSpPr>
-      <p:grpSpPr>
-        <a:xfrm>
-          <a:off x="0" y="0"/>
-          <a:ext cx="0" cy="0"/>
-          <a:chOff x="0" y="0"/>
-          <a:chExt cx="0" cy="0"/>
-        </a:xfrm>
-      </p:grpSpPr>
-      <p:sp>
-        <p:nvSpPr>
-          <p:cNvPr id="2" name="Rectangle 1"/>
-          <p:cNvSpPr/>
-          <p:nvPr/>
-        </p:nvSpPr>
-        <p:spPr>
-          <a:xfrm>
-            <a:off x="0" y="0"/>
-            <a:ext cx="12191695" cy="530352"/>
-          </a:xfrm>
-          <a:prstGeom prst="rect">
-            <a:avLst/>
-          </a:prstGeom>
-          <a:solidFill>
-            <a:srgbClr val="0B1F44"/>
-          </a:solidFill>
-          <a:ln>
-            <a:noFill/>
-          </a:ln>
-        </p:spPr>
-        <p:style>
-          <a:lnRef idx="1">
-            <a:schemeClr val="accent1"/>
-          </a:lnRef>
-          <a:fillRef idx="3">
-            <a:schemeClr val="accent1"/>
-          </a:fillRef>
-          <a:effectRef idx="2">
-            <a:schemeClr val="accent1"/>
-          </a:effectRef>
-          <a:fontRef idx="minor">
-            <a:schemeClr val="lt1"/>
-          </a:fontRef>
-        </p:style>
-        <p:txBody>
-          <a:bodyPr rtlCol="0" anchor="ctr"/>
-          <a:lstStyle/>
-          <a:p>
-            <a:pPr algn="ctr"/>
-            <a:endParaRPr/>
-          </a:p>
-        </p:txBody>
-      </p:sp>
-      <p:sp>
-        <p:nvSpPr>
-          <p:cNvPr id="3" name="TextBox 2"/>
-          <p:cNvSpPr txBox="1"/>
-          <p:nvPr/>
-        </p:nvSpPr>
-        <p:spPr>
-          <a:xfrm>
-            <a:off x="320040" y="91440"/>
-            <a:ext cx="9418320" cy="363176"/>
-          </a:xfrm>
-          <a:prstGeom prst="rect">
-            <a:avLst/>
-          </a:prstGeom>
-          <a:noFill/>
-        </p:spPr>
-        <p:txBody>
-          <a:bodyPr wrap="square" lIns="54864" tIns="27432" rIns="54864" bIns="27432">
-            <a:spAutoFit/>
-          </a:bodyPr>
-          <a:lstStyle/>
-          <a:p>
-            <a:pPr algn="l"/>
-            <a:r>
-              <a:rPr lang="en-US" sz="2000" b="1" dirty="0">
-                <a:solidFill>
-                  <a:srgbClr val="FFFFFF"/>
-                </a:solidFill>
-                <a:latin typeface="Aptos"/>
-              </a:rPr>
-              <a:t>N</a:t>
-            </a:r>
-            <a:r>
-              <a:rPr sz="2000" b="1" dirty="0">
-                <a:solidFill>
-                  <a:srgbClr val="FFFFFF"/>
-                </a:solidFill>
-                <a:latin typeface="Aptos"/>
-              </a:rPr>
-              <a:t>ext steps</a:t>
-            </a:r>
-          </a:p>
-        </p:txBody>
-      </p:sp>
-      <p:sp>
-        <p:nvSpPr>
-          <p:cNvPr id="4" name="TextBox 3"/>
-          <p:cNvSpPr txBox="1"/>
-          <p:nvPr/>
-        </p:nvSpPr>
-        <p:spPr>
-          <a:xfrm>
-            <a:off x="9921240" y="137160"/>
-            <a:ext cx="1828800" cy="274320"/>
-          </a:xfrm>
-          <a:prstGeom prst="rect">
-            <a:avLst/>
-          </a:prstGeom>
-          <a:noFill/>
-        </p:spPr>
-        <p:txBody>
-          <a:bodyPr wrap="square" lIns="54864" tIns="27432" rIns="54864" bIns="27432">
-            <a:spAutoFit/>
-          </a:bodyPr>
-          <a:lstStyle/>
-          <a:p>
-            <a:pPr algn="r"/>
-            <a:r>
-              <a:rPr sz="1000" b="0">
-                <a:solidFill>
-                  <a:srgbClr val="CBD5E1"/>
-                </a:solidFill>
-                <a:latin typeface="Aptos"/>
-              </a:rPr>
-              <a:t>Close</a:t>
-            </a:r>
-          </a:p>
-        </p:txBody>
-      </p:sp>
-      <p:sp>
-        <p:nvSpPr>
-          <p:cNvPr id="5" name="Oval 4"/>
-          <p:cNvSpPr/>
-          <p:nvPr/>
-        </p:nvSpPr>
-        <p:spPr>
-          <a:xfrm>
-            <a:off x="11759184" y="100584"/>
-            <a:ext cx="310896" cy="310896"/>
-          </a:xfrm>
-          <a:prstGeom prst="ellipse">
-            <a:avLst/>
-          </a:prstGeom>
-          <a:solidFill>
-            <a:srgbClr val="2563EB"/>
-          </a:solidFill>
-          <a:ln w="12700">
-            <a:solidFill>
-              <a:srgbClr val="93C5FD"/>
-            </a:solidFill>
-          </a:ln>
-        </p:spPr>
-        <p:style>
-          <a:lnRef idx="1">
-            <a:schemeClr val="accent1"/>
-          </a:lnRef>
-          <a:fillRef idx="3">
-            <a:schemeClr val="accent1"/>
-          </a:fillRef>
-          <a:effectRef idx="2">
-            <a:schemeClr val="accent1"/>
-          </a:effectRef>
-          <a:fontRef idx="minor">
-            <a:schemeClr val="lt1"/>
-          </a:fontRef>
-        </p:style>
-        <p:txBody>
-          <a:bodyPr rtlCol="0" anchor="ctr"/>
-          <a:lstStyle/>
-          <a:p>
-            <a:pPr algn="ctr"/>
-            <a:endParaRPr/>
-          </a:p>
-        </p:txBody>
-      </p:sp>
-      <p:sp>
-        <p:nvSpPr>
-          <p:cNvPr id="6" name="TextBox 5"/>
-          <p:cNvSpPr txBox="1"/>
-          <p:nvPr/>
-        </p:nvSpPr>
-        <p:spPr>
-          <a:xfrm>
-            <a:off x="11759184" y="132588"/>
-            <a:ext cx="310896" cy="201168"/>
-          </a:xfrm>
-          <a:prstGeom prst="rect">
-            <a:avLst/>
-          </a:prstGeom>
-          <a:noFill/>
-        </p:spPr>
-        <p:txBody>
-          <a:bodyPr wrap="square" lIns="54864" tIns="27432" rIns="54864" bIns="27432">
-            <a:spAutoFit/>
-          </a:bodyPr>
-          <a:lstStyle/>
-          <a:p>
-            <a:pPr algn="ctr"/>
-            <a:r>
-              <a:rPr sz="800" b="1">
-                <a:solidFill>
-                  <a:srgbClr val="FFFFFF"/>
-                </a:solidFill>
-                <a:latin typeface="Aptos"/>
-              </a:rPr>
-              <a:t>20</a:t>
-            </a:r>
-          </a:p>
-        </p:txBody>
-      </p:sp>
-      <p:sp>
-        <p:nvSpPr>
-          <p:cNvPr id="7" name="TextBox 6"/>
-          <p:cNvSpPr txBox="1"/>
-          <p:nvPr/>
-        </p:nvSpPr>
-        <p:spPr>
-          <a:xfrm>
-            <a:off x="320040" y="6565392"/>
-            <a:ext cx="7498079" cy="201168"/>
-          </a:xfrm>
-          <a:prstGeom prst="rect">
-            <a:avLst/>
-          </a:prstGeom>
-          <a:noFill/>
-        </p:spPr>
-        <p:txBody>
-          <a:bodyPr wrap="square" lIns="54864" tIns="27432" rIns="54864" bIns="27432">
-            <a:spAutoFit/>
-          </a:bodyPr>
-          <a:lstStyle/>
-          <a:p>
-            <a:pPr algn="l"/>
-            <a:r>
-              <a:rPr sz="800" b="0">
-                <a:solidFill>
-                  <a:srgbClr val="64748B"/>
-                </a:solidFill>
-                <a:latin typeface="Aptos"/>
-              </a:rPr>
-              <a:t>Comparison of sensor-conditioned and dynamics-learning PINNs for fixed-wing UAV state estimation</a:t>
-            </a:r>
-          </a:p>
-        </p:txBody>
-      </p:sp>
-      <p:sp>
-        <p:nvSpPr>
-          <p:cNvPr id="8" name="TextBox 7"/>
-          <p:cNvSpPr txBox="1"/>
-          <p:nvPr/>
-        </p:nvSpPr>
-        <p:spPr>
-          <a:xfrm>
-            <a:off x="11247120" y="6565392"/>
-            <a:ext cx="640080" cy="201168"/>
-          </a:xfrm>
-          <a:prstGeom prst="rect">
-            <a:avLst/>
-          </a:prstGeom>
-          <a:noFill/>
-        </p:spPr>
-        <p:txBody>
-          <a:bodyPr wrap="square" lIns="54864" tIns="27432" rIns="54864" bIns="27432">
-            <a:spAutoFit/>
-          </a:bodyPr>
-          <a:lstStyle/>
-          <a:p>
-            <a:pPr algn="r"/>
-            <a:r>
-              <a:rPr sz="800" b="0">
-                <a:solidFill>
-                  <a:srgbClr val="64748B"/>
-                </a:solidFill>
-                <a:latin typeface="Aptos"/>
-              </a:rPr>
-              <a:t>20/20</a:t>
-            </a:r>
-          </a:p>
-        </p:txBody>
-      </p:sp>
-      <p:sp>
-        <p:nvSpPr>
-          <p:cNvPr id="9" name="Rounded Rectangle 8"/>
-          <p:cNvSpPr/>
-          <p:nvPr/>
-        </p:nvSpPr>
-        <p:spPr>
-          <a:xfrm>
-            <a:off x="777240" y="868680"/>
-            <a:ext cx="10652760" cy="1188720"/>
-          </a:xfrm>
-          <a:prstGeom prst="roundRect">
-            <a:avLst/>
-          </a:prstGeom>
-          <a:solidFill>
-            <a:srgbClr val="FFFFFF"/>
-          </a:solidFill>
-          <a:ln w="17780">
-            <a:solidFill>
-              <a:srgbClr val="0B1F44"/>
-            </a:solidFill>
-          </a:ln>
-        </p:spPr>
-        <p:style>
-          <a:lnRef idx="1">
-            <a:schemeClr val="accent1"/>
-          </a:lnRef>
-          <a:fillRef idx="3">
-            <a:schemeClr val="accent1"/>
-          </a:fillRef>
-          <a:effectRef idx="2">
-            <a:schemeClr val="accent1"/>
-          </a:effectRef>
-          <a:fontRef idx="minor">
-            <a:schemeClr val="lt1"/>
-          </a:fontRef>
-        </p:style>
-        <p:txBody>
-          <a:bodyPr rtlCol="0" anchor="ctr"/>
-          <a:lstStyle/>
-          <a:p>
-            <a:pPr algn="ctr"/>
-            <a:endParaRPr/>
-          </a:p>
-        </p:txBody>
-      </p:sp>
-      <p:sp>
-        <p:nvSpPr>
-          <p:cNvPr id="10" name="Rectangle 9"/>
-          <p:cNvSpPr/>
-          <p:nvPr/>
-        </p:nvSpPr>
-        <p:spPr>
-          <a:xfrm>
-            <a:off x="777240" y="868680"/>
-            <a:ext cx="73152" cy="1188720"/>
-          </a:xfrm>
-          <a:prstGeom prst="rect">
-            <a:avLst/>
-          </a:prstGeom>
-          <a:solidFill>
-            <a:srgbClr val="0B1F44"/>
-          </a:solidFill>
-          <a:ln>
-            <a:noFill/>
-          </a:ln>
-        </p:spPr>
-        <p:style>
-          <a:lnRef idx="1">
-            <a:schemeClr val="accent1"/>
-          </a:lnRef>
-          <a:fillRef idx="3">
-            <a:schemeClr val="accent1"/>
-          </a:fillRef>
-          <a:effectRef idx="2">
-            <a:schemeClr val="accent1"/>
-          </a:effectRef>
-          <a:fontRef idx="minor">
-            <a:schemeClr val="lt1"/>
-          </a:fontRef>
-        </p:style>
-        <p:txBody>
-          <a:bodyPr rtlCol="0" anchor="ctr"/>
-          <a:lstStyle/>
-          <a:p>
-            <a:pPr algn="ctr"/>
-            <a:endParaRPr/>
-          </a:p>
-        </p:txBody>
-      </p:sp>
-      <p:sp>
-        <p:nvSpPr>
-          <p:cNvPr id="11" name="TextBox 10"/>
-          <p:cNvSpPr txBox="1"/>
-          <p:nvPr/>
-        </p:nvSpPr>
-        <p:spPr>
-          <a:xfrm>
-            <a:off x="923544" y="960120"/>
-            <a:ext cx="10424160" cy="256032"/>
-          </a:xfrm>
-          <a:prstGeom prst="rect">
-            <a:avLst/>
-          </a:prstGeom>
-          <a:noFill/>
-        </p:spPr>
-        <p:txBody>
-          <a:bodyPr wrap="square" lIns="54864" tIns="27432" rIns="54864" bIns="27432">
-            <a:spAutoFit/>
-          </a:bodyPr>
-          <a:lstStyle/>
-          <a:p>
-            <a:pPr algn="l"/>
-            <a:r>
-              <a:rPr sz="1500" b="1">
-                <a:solidFill>
-                  <a:srgbClr val="0B1F44"/>
-                </a:solidFill>
-                <a:latin typeface="Aptos"/>
-              </a:rPr>
-              <a:t>Conclusion</a:t>
-            </a:r>
-          </a:p>
-        </p:txBody>
-      </p:sp>
-      <p:sp>
-        <p:nvSpPr>
-          <p:cNvPr id="12" name="TextBox 11"/>
-          <p:cNvSpPr txBox="1"/>
-          <p:nvPr/>
-        </p:nvSpPr>
-        <p:spPr>
-          <a:xfrm>
-            <a:off x="923544" y="1280160"/>
-            <a:ext cx="10424160" cy="547842"/>
-          </a:xfrm>
-          <a:prstGeom prst="rect">
-            <a:avLst/>
-          </a:prstGeom>
-          <a:noFill/>
-        </p:spPr>
-        <p:txBody>
-          <a:bodyPr wrap="square" lIns="54864" tIns="27432" rIns="54864" bIns="27432">
-            <a:spAutoFit/>
-          </a:bodyPr>
-          <a:lstStyle/>
-          <a:p>
-            <a:pPr algn="l"/>
-            <a:r>
-              <a:rPr sz="1600" b="0" dirty="0">
-                <a:solidFill>
-                  <a:srgbClr val="334155"/>
-                </a:solidFill>
-                <a:latin typeface="Aptos"/>
-              </a:rPr>
-              <a:t>The two PINN codes solve complementary tasks. The dynamics-learning PINN is stronger for temporal state propagation; the sensor-conditioned PINN is stronger for measurement-conditioned wind and velocity reconstruction.</a:t>
-            </a:r>
-          </a:p>
-        </p:txBody>
-      </p:sp>
-      <p:sp>
-        <p:nvSpPr>
-          <p:cNvPr id="13" name="Rounded Rectangle 12"/>
-          <p:cNvSpPr/>
-          <p:nvPr/>
-        </p:nvSpPr>
-        <p:spPr>
-          <a:xfrm>
-            <a:off x="777240" y="2331720"/>
-            <a:ext cx="3337560" cy="1828800"/>
-          </a:xfrm>
-          <a:prstGeom prst="roundRect">
-            <a:avLst/>
-          </a:prstGeom>
-          <a:solidFill>
-            <a:srgbClr val="FFFFFF"/>
-          </a:solidFill>
-          <a:ln w="17780">
-            <a:solidFill>
-              <a:srgbClr val="D97706"/>
-            </a:solidFill>
-          </a:ln>
-        </p:spPr>
-        <p:style>
-          <a:lnRef idx="1">
-            <a:schemeClr val="accent1"/>
-          </a:lnRef>
-          <a:fillRef idx="3">
-            <a:schemeClr val="accent1"/>
-          </a:fillRef>
-          <a:effectRef idx="2">
-            <a:schemeClr val="accent1"/>
-          </a:effectRef>
-          <a:fontRef idx="minor">
-            <a:schemeClr val="lt1"/>
-          </a:fontRef>
-        </p:style>
-        <p:txBody>
-          <a:bodyPr rtlCol="0" anchor="ctr"/>
-          <a:lstStyle/>
-          <a:p>
-            <a:pPr algn="ctr"/>
-            <a:endParaRPr/>
-          </a:p>
-        </p:txBody>
-      </p:sp>
-      <p:sp>
-        <p:nvSpPr>
-          <p:cNvPr id="14" name="Rectangle 13"/>
-          <p:cNvSpPr/>
-          <p:nvPr/>
-        </p:nvSpPr>
-        <p:spPr>
-          <a:xfrm>
-            <a:off x="777240" y="2331720"/>
-            <a:ext cx="73152" cy="1828800"/>
-          </a:xfrm>
-          <a:prstGeom prst="rect">
-            <a:avLst/>
-          </a:prstGeom>
-          <a:solidFill>
-            <a:srgbClr val="D97706"/>
-          </a:solidFill>
-          <a:ln>
-            <a:noFill/>
-          </a:ln>
-        </p:spPr>
-        <p:style>
-          <a:lnRef idx="1">
-            <a:schemeClr val="accent1"/>
-          </a:lnRef>
-          <a:fillRef idx="3">
-            <a:schemeClr val="accent1"/>
-          </a:fillRef>
-          <a:effectRef idx="2">
-            <a:schemeClr val="accent1"/>
-          </a:effectRef>
-          <a:fontRef idx="minor">
-            <a:schemeClr val="lt1"/>
-          </a:fontRef>
-        </p:style>
-        <p:txBody>
-          <a:bodyPr rtlCol="0" anchor="ctr"/>
-          <a:lstStyle/>
-          <a:p>
-            <a:pPr algn="ctr"/>
-            <a:endParaRPr/>
-          </a:p>
-        </p:txBody>
-      </p:sp>
-      <p:sp>
-        <p:nvSpPr>
-          <p:cNvPr id="15" name="TextBox 14"/>
-          <p:cNvSpPr txBox="1"/>
-          <p:nvPr/>
-        </p:nvSpPr>
-        <p:spPr>
-          <a:xfrm>
-            <a:off x="923544" y="2423160"/>
-            <a:ext cx="3108960" cy="256032"/>
-          </a:xfrm>
-          <a:prstGeom prst="rect">
-            <a:avLst/>
-          </a:prstGeom>
-          <a:noFill/>
-        </p:spPr>
-        <p:txBody>
-          <a:bodyPr wrap="square" lIns="54864" tIns="27432" rIns="54864" bIns="27432">
-            <a:spAutoFit/>
-          </a:bodyPr>
-          <a:lstStyle/>
-          <a:p>
-            <a:pPr algn="l"/>
-            <a:r>
-              <a:rPr sz="1400" b="1">
-                <a:solidFill>
-                  <a:srgbClr val="D97706"/>
-                </a:solidFill>
-                <a:latin typeface="Aptos"/>
-              </a:rPr>
-              <a:t>1. Best current use</a:t>
-            </a:r>
-          </a:p>
-        </p:txBody>
-      </p:sp>
-      <p:sp>
-        <p:nvSpPr>
-          <p:cNvPr id="16" name="TextBox 15"/>
-          <p:cNvSpPr txBox="1"/>
-          <p:nvPr/>
-        </p:nvSpPr>
-        <p:spPr>
-          <a:xfrm>
-            <a:off x="923544" y="2743200"/>
-            <a:ext cx="3108960" cy="1040285"/>
-          </a:xfrm>
-          <a:prstGeom prst="rect">
-            <a:avLst/>
-          </a:prstGeom>
-          <a:noFill/>
-        </p:spPr>
-        <p:txBody>
-          <a:bodyPr wrap="square" lIns="54864" tIns="27432" rIns="54864" bIns="27432">
-            <a:spAutoFit/>
-          </a:bodyPr>
-          <a:lstStyle/>
-          <a:p>
-            <a:pPr algn="l"/>
-            <a:r>
-              <a:rPr sz="1600" b="0" dirty="0">
-                <a:solidFill>
-                  <a:srgbClr val="334155"/>
-                </a:solidFill>
-                <a:latin typeface="Aptos"/>
-              </a:rPr>
-              <a:t>Use the dynamics-learning model for rollout-aware process correction, especially where temporal consistency dominates.</a:t>
-            </a:r>
-          </a:p>
-        </p:txBody>
-      </p:sp>
-      <p:sp>
-        <p:nvSpPr>
-          <p:cNvPr id="17" name="Rounded Rectangle 16"/>
-          <p:cNvSpPr/>
-          <p:nvPr/>
-        </p:nvSpPr>
-        <p:spPr>
-          <a:xfrm>
-            <a:off x="4434840" y="2331720"/>
-            <a:ext cx="3337560" cy="1828800"/>
-          </a:xfrm>
-          <a:prstGeom prst="roundRect">
-            <a:avLst/>
-          </a:prstGeom>
-          <a:solidFill>
-            <a:srgbClr val="FFFFFF"/>
-          </a:solidFill>
-          <a:ln w="17780">
-            <a:solidFill>
-              <a:srgbClr val="2266B2"/>
-            </a:solidFill>
-          </a:ln>
-        </p:spPr>
-        <p:style>
-          <a:lnRef idx="1">
-            <a:schemeClr val="accent1"/>
-          </a:lnRef>
-          <a:fillRef idx="3">
-            <a:schemeClr val="accent1"/>
-          </a:fillRef>
-          <a:effectRef idx="2">
-            <a:schemeClr val="accent1"/>
-          </a:effectRef>
-          <a:fontRef idx="minor">
-            <a:schemeClr val="lt1"/>
-          </a:fontRef>
-        </p:style>
-        <p:txBody>
-          <a:bodyPr rtlCol="0" anchor="ctr"/>
-          <a:lstStyle/>
-          <a:p>
-            <a:pPr algn="ctr"/>
-            <a:endParaRPr/>
-          </a:p>
-        </p:txBody>
-      </p:sp>
-      <p:sp>
-        <p:nvSpPr>
-          <p:cNvPr id="18" name="Rectangle 17"/>
-          <p:cNvSpPr/>
-          <p:nvPr/>
-        </p:nvSpPr>
-        <p:spPr>
-          <a:xfrm>
-            <a:off x="4434840" y="2331720"/>
-            <a:ext cx="73152" cy="1828800"/>
-          </a:xfrm>
-          <a:prstGeom prst="rect">
-            <a:avLst/>
-          </a:prstGeom>
-          <a:solidFill>
-            <a:srgbClr val="2266B2"/>
-          </a:solidFill>
-          <a:ln>
-            <a:noFill/>
-          </a:ln>
-        </p:spPr>
-        <p:style>
-          <a:lnRef idx="1">
-            <a:schemeClr val="accent1"/>
-          </a:lnRef>
-          <a:fillRef idx="3">
-            <a:schemeClr val="accent1"/>
-          </a:fillRef>
-          <a:effectRef idx="2">
-            <a:schemeClr val="accent1"/>
-          </a:effectRef>
-          <a:fontRef idx="minor">
-            <a:schemeClr val="lt1"/>
-          </a:fontRef>
-        </p:style>
-        <p:txBody>
-          <a:bodyPr rtlCol="0" anchor="ctr"/>
-          <a:lstStyle/>
-          <a:p>
-            <a:pPr algn="ctr"/>
-            <a:endParaRPr/>
-          </a:p>
-        </p:txBody>
-      </p:sp>
-      <p:sp>
-        <p:nvSpPr>
-          <p:cNvPr id="19" name="TextBox 18"/>
-          <p:cNvSpPr txBox="1"/>
-          <p:nvPr/>
-        </p:nvSpPr>
-        <p:spPr>
-          <a:xfrm>
-            <a:off x="4581144" y="2423160"/>
-            <a:ext cx="3108960" cy="256032"/>
-          </a:xfrm>
-          <a:prstGeom prst="rect">
-            <a:avLst/>
-          </a:prstGeom>
-          <a:noFill/>
-        </p:spPr>
-        <p:txBody>
-          <a:bodyPr wrap="square" lIns="54864" tIns="27432" rIns="54864" bIns="27432">
-            <a:spAutoFit/>
-          </a:bodyPr>
-          <a:lstStyle/>
-          <a:p>
-            <a:pPr algn="l"/>
-            <a:r>
-              <a:rPr sz="1400" b="1">
-                <a:solidFill>
-                  <a:srgbClr val="2266B2"/>
-                </a:solidFill>
-                <a:latin typeface="Aptos"/>
-              </a:rPr>
-              <a:t>2. Best current use</a:t>
-            </a:r>
-          </a:p>
-        </p:txBody>
-      </p:sp>
-      <p:sp>
-        <p:nvSpPr>
-          <p:cNvPr id="20" name="TextBox 19"/>
-          <p:cNvSpPr txBox="1"/>
-          <p:nvPr/>
-        </p:nvSpPr>
-        <p:spPr>
-          <a:xfrm>
-            <a:off x="4581144" y="2743200"/>
-            <a:ext cx="3108960" cy="1325880"/>
-          </a:xfrm>
-          <a:prstGeom prst="rect">
-            <a:avLst/>
-          </a:prstGeom>
-          <a:noFill/>
-        </p:spPr>
-        <p:txBody>
-          <a:bodyPr wrap="square" lIns="54864" tIns="27432" rIns="54864" bIns="27432">
-            <a:spAutoFit/>
-          </a:bodyPr>
-          <a:lstStyle/>
-          <a:p>
-            <a:pPr algn="l"/>
-            <a:r>
-              <a:rPr sz="1600" b="0" dirty="0">
-                <a:solidFill>
-                  <a:srgbClr val="334155"/>
-                </a:solidFill>
-                <a:latin typeface="Aptos"/>
-              </a:rPr>
-              <a:t>Use sensor conditioning for algebraic measurement consistency, wind recovery, and direct state reconstruction from noisy sensor channels.</a:t>
-            </a:r>
-          </a:p>
-        </p:txBody>
-      </p:sp>
-      <p:sp>
-        <p:nvSpPr>
-          <p:cNvPr id="21" name="Rounded Rectangle 20"/>
-          <p:cNvSpPr/>
-          <p:nvPr/>
-        </p:nvSpPr>
-        <p:spPr>
-          <a:xfrm>
-            <a:off x="8092440" y="2331720"/>
-            <a:ext cx="3337560" cy="1828800"/>
-          </a:xfrm>
-          <a:prstGeom prst="roundRect">
-            <a:avLst/>
-          </a:prstGeom>
-          <a:solidFill>
-            <a:srgbClr val="FFFFFF"/>
-          </a:solidFill>
-          <a:ln w="17780">
-            <a:solidFill>
-              <a:srgbClr val="6F42C1"/>
-            </a:solidFill>
-          </a:ln>
-        </p:spPr>
-        <p:style>
-          <a:lnRef idx="1">
-            <a:schemeClr val="accent1"/>
-          </a:lnRef>
-          <a:fillRef idx="3">
-            <a:schemeClr val="accent1"/>
-          </a:fillRef>
-          <a:effectRef idx="2">
-            <a:schemeClr val="accent1"/>
-          </a:effectRef>
-          <a:fontRef idx="minor">
-            <a:schemeClr val="lt1"/>
-          </a:fontRef>
-        </p:style>
-        <p:txBody>
-          <a:bodyPr rtlCol="0" anchor="ctr"/>
-          <a:lstStyle/>
-          <a:p>
-            <a:pPr algn="ctr"/>
-            <a:endParaRPr/>
-          </a:p>
-        </p:txBody>
-      </p:sp>
-      <p:sp>
-        <p:nvSpPr>
-          <p:cNvPr id="22" name="Rectangle 21"/>
-          <p:cNvSpPr/>
-          <p:nvPr/>
-        </p:nvSpPr>
-        <p:spPr>
-          <a:xfrm>
-            <a:off x="8092440" y="2331720"/>
-            <a:ext cx="73152" cy="1828800"/>
-          </a:xfrm>
-          <a:prstGeom prst="rect">
-            <a:avLst/>
-          </a:prstGeom>
-          <a:solidFill>
-            <a:srgbClr val="6F42C1"/>
-          </a:solidFill>
-          <a:ln>
-            <a:noFill/>
-          </a:ln>
-        </p:spPr>
-        <p:style>
-          <a:lnRef idx="1">
-            <a:schemeClr val="accent1"/>
-          </a:lnRef>
-          <a:fillRef idx="3">
-            <a:schemeClr val="accent1"/>
-          </a:fillRef>
-          <a:effectRef idx="2">
-            <a:schemeClr val="accent1"/>
-          </a:effectRef>
-          <a:fontRef idx="minor">
-            <a:schemeClr val="lt1"/>
-          </a:fontRef>
-        </p:style>
-        <p:txBody>
-          <a:bodyPr rtlCol="0" anchor="ctr"/>
-          <a:lstStyle/>
-          <a:p>
-            <a:pPr algn="ctr"/>
-            <a:endParaRPr/>
-          </a:p>
-        </p:txBody>
-      </p:sp>
-      <p:sp>
-        <p:nvSpPr>
-          <p:cNvPr id="23" name="TextBox 22"/>
-          <p:cNvSpPr txBox="1"/>
-          <p:nvPr/>
-        </p:nvSpPr>
-        <p:spPr>
-          <a:xfrm>
-            <a:off x="8238744" y="2423160"/>
-            <a:ext cx="3108960" cy="256032"/>
-          </a:xfrm>
-          <a:prstGeom prst="rect">
-            <a:avLst/>
-          </a:prstGeom>
-          <a:noFill/>
-        </p:spPr>
-        <p:txBody>
-          <a:bodyPr wrap="square" lIns="54864" tIns="27432" rIns="54864" bIns="27432">
-            <a:spAutoFit/>
-          </a:bodyPr>
-          <a:lstStyle/>
-          <a:p>
-            <a:pPr algn="l"/>
-            <a:r>
-              <a:rPr sz="1400" b="1">
-                <a:solidFill>
-                  <a:srgbClr val="6F42C1"/>
-                </a:solidFill>
-                <a:latin typeface="Aptos"/>
-              </a:rPr>
-              <a:t>3. Next architecture</a:t>
-            </a:r>
-          </a:p>
-        </p:txBody>
-      </p:sp>
-      <p:sp>
-        <p:nvSpPr>
-          <p:cNvPr id="24" name="TextBox 23"/>
-          <p:cNvSpPr txBox="1"/>
-          <p:nvPr/>
-        </p:nvSpPr>
-        <p:spPr>
-          <a:xfrm>
-            <a:off x="8238744" y="2743200"/>
-            <a:ext cx="3108960" cy="1040285"/>
-          </a:xfrm>
-          <a:prstGeom prst="rect">
-            <a:avLst/>
-          </a:prstGeom>
-          <a:noFill/>
-        </p:spPr>
-        <p:txBody>
-          <a:bodyPr wrap="square" lIns="54864" tIns="27432" rIns="54864" bIns="27432">
-            <a:spAutoFit/>
-          </a:bodyPr>
-          <a:lstStyle/>
-          <a:p>
-            <a:pPr algn="l"/>
-            <a:r>
-              <a:rPr sz="1600" b="0" dirty="0">
-                <a:solidFill>
-                  <a:srgbClr val="334155"/>
-                </a:solidFill>
-                <a:latin typeface="Aptos"/>
-              </a:rPr>
-              <a:t>Build a hybrid: sensor-conditioned transition correction inside a recursive filter with uncertainty and rollout training.</a:t>
-            </a:r>
-          </a:p>
-        </p:txBody>
-      </p:sp>
-      <p:sp>
-        <p:nvSpPr>
-          <p:cNvPr id="25" name="TextBox 24"/>
-          <p:cNvSpPr txBox="1"/>
-          <p:nvPr/>
-        </p:nvSpPr>
-        <p:spPr>
-          <a:xfrm>
-            <a:off x="914400" y="4892040"/>
-            <a:ext cx="10424160" cy="731520"/>
-          </a:xfrm>
-          <a:prstGeom prst="rect">
-            <a:avLst/>
-          </a:prstGeom>
-          <a:noFill/>
-        </p:spPr>
-        <p:txBody>
-          <a:bodyPr wrap="square" lIns="54864" tIns="27432" rIns="54864" bIns="27432">
-            <a:spAutoFit/>
-          </a:bodyPr>
-          <a:lstStyle/>
-          <a:p>
-            <a:pPr algn="ctr"/>
-            <a:r>
-              <a:rPr sz="1500" b="0">
-                <a:solidFill>
-                  <a:srgbClr val="334155"/>
-                </a:solidFill>
-                <a:latin typeface="Aptos"/>
-              </a:rPr>
-              <a:t>Recommended next experiment: train a recurrent sensor-conditioned transition PINN with measurement updates at every step, compare against EKF/IEKF using the exact saved RMSE arrays, and add ablations for Fourier features, rollout horizon, and physics weights.</a:t>
-            </a:r>
-          </a:p>
-        </p:txBody>
-      </p:sp>
-    </p:spTree>
   </p:cSld>
   <p:clrMapOvr>
     <a:masterClrMapping/>
